--- a/lessons/Day3/D_unsupervised.pptx
+++ b/lessons/Day3/D_unsupervised.pptx
@@ -16835,7 +16835,7 @@
           <a:p>
             <a:fld id="{B0C0A60C-850A-4EA4-9C14-A8FE98B94505}" type="datetimeFigureOut">
               <a:rPr lang="en-US" smtClean="0"/>
-              <a:t>6/24/25</a:t>
+              <a:t>6/10/26</a:t>
             </a:fld>
             <a:endParaRPr lang="en-US"/>
           </a:p>
@@ -17234,7 +17234,7 @@
           <a:p>
             <a:fld id="{5738B90E-0779-4C36-915C-6F05FCD89456}" type="datetime1">
               <a:rPr lang="en-US" smtClean="0"/>
-              <a:t>6/24/25</a:t>
+              <a:t>6/10/26</a:t>
             </a:fld>
             <a:endParaRPr lang="en-US"/>
           </a:p>
@@ -17431,7 +17431,7 @@
           <a:p>
             <a:fld id="{7B9EA29D-D431-42FE-B7B6-AAE4454C77D3}" type="datetime1">
               <a:rPr lang="en-US" smtClean="0"/>
-              <a:t>6/24/25</a:t>
+              <a:t>6/10/26</a:t>
             </a:fld>
             <a:endParaRPr lang="en-US"/>
           </a:p>
@@ -17786,7 +17786,7 @@
           <a:p>
             <a:fld id="{690D8A1E-EA8F-46C1-B891-AE0C00D9C314}" type="datetime1">
               <a:rPr lang="en-US" smtClean="0"/>
-              <a:t>6/24/25</a:t>
+              <a:t>6/10/26</a:t>
             </a:fld>
             <a:endParaRPr lang="en-US"/>
           </a:p>
@@ -18094,7 +18094,7 @@
           <a:p>
             <a:fld id="{D753EFC8-4232-4598-94F6-94C0EBAFC469}" type="datetime1">
               <a:rPr lang="en-US" smtClean="0"/>
-              <a:t>6/24/25</a:t>
+              <a:t>6/10/26</a:t>
             </a:fld>
             <a:endParaRPr lang="en-US"/>
           </a:p>
@@ -18423,7 +18423,7 @@
           <a:p>
             <a:fld id="{F3161074-1C18-4AE7-957D-F18524378C85}" type="datetime1">
               <a:rPr lang="en-US" smtClean="0"/>
-              <a:t>6/24/25</a:t>
+              <a:t>6/10/26</a:t>
             </a:fld>
             <a:endParaRPr lang="en-US"/>
           </a:p>
@@ -18676,7 +18676,7 @@
           <a:p>
             <a:fld id="{69BE256C-8D9A-4404-B47D-41A1AE514425}" type="datetime1">
               <a:rPr lang="en-US" smtClean="0"/>
-              <a:t>6/24/25</a:t>
+              <a:t>6/10/26</a:t>
             </a:fld>
             <a:endParaRPr lang="en-US"/>
           </a:p>
@@ -19124,7 +19124,7 @@
           <a:p>
             <a:fld id="{66CB2154-9035-4012-8189-BAAB61C5A5EE}" type="datetime1">
               <a:rPr lang="en-US" smtClean="0"/>
-              <a:t>6/24/25</a:t>
+              <a:t>6/10/26</a:t>
             </a:fld>
             <a:endParaRPr lang="en-US"/>
           </a:p>
@@ -19312,7 +19312,7 @@
           <a:p>
             <a:fld id="{6700A58B-DD98-43D0-B791-721480A02982}" type="datetime1">
               <a:rPr lang="en-US" smtClean="0"/>
-              <a:t>6/24/25</a:t>
+              <a:t>6/10/26</a:t>
             </a:fld>
             <a:endParaRPr lang="en-US"/>
           </a:p>
@@ -19518,7 +19518,7 @@
           <a:p>
             <a:fld id="{7DB6E382-4F61-4E24-BE1A-377EC83D0E3A}" type="datetime1">
               <a:rPr lang="en-US" smtClean="0"/>
-              <a:t>6/24/25</a:t>
+              <a:t>6/10/26</a:t>
             </a:fld>
             <a:endParaRPr lang="en-US"/>
           </a:p>
@@ -19924,7 +19924,7 @@
           <a:p>
             <a:fld id="{4142EED6-FC16-45B9-B8C4-2BC5DBA88325}" type="datetime1">
               <a:rPr lang="en-US" smtClean="0"/>
-              <a:t>6/24/25</a:t>
+              <a:t>6/10/26</a:t>
             </a:fld>
             <a:endParaRPr lang="en-US"/>
           </a:p>
@@ -20256,7 +20256,7 @@
           <a:p>
             <a:fld id="{DF59512B-4F1D-43D7-8819-2F53FEF69650}" type="datetime1">
               <a:rPr lang="en-US" smtClean="0"/>
-              <a:t>6/24/25</a:t>
+              <a:t>6/10/26</a:t>
             </a:fld>
             <a:endParaRPr lang="en-US"/>
           </a:p>
@@ -20546,7 +20546,7 @@
           <a:p>
             <a:fld id="{08437B94-E2BF-44DC-ADC5-B05FC9934E9D}" type="datetime1">
               <a:rPr lang="en-US" smtClean="0"/>
-              <a:t>6/24/25</a:t>
+              <a:t>6/10/26</a:t>
             </a:fld>
             <a:endParaRPr lang="en-US"/>
           </a:p>
@@ -20985,7 +20985,7 @@
           <a:p>
             <a:fld id="{6700A58B-DD98-43D0-B791-721480A02982}" type="datetime1">
               <a:rPr lang="en-US" smtClean="0"/>
-              <a:t>6/24/25</a:t>
+              <a:t>6/10/26</a:t>
             </a:fld>
             <a:endParaRPr lang="en-US"/>
           </a:p>
@@ -23265,7 +23265,7 @@
             <a:fld id="{6700A58B-DD98-43D0-B791-721480A02982}" type="datetime1">
               <a:rPr lang="en-US" smtClean="0"/>
               <a:pPr/>
-              <a:t>6/24/25</a:t>
+              <a:t>6/10/26</a:t>
             </a:fld>
             <a:endParaRPr lang="en-US"/>
           </a:p>
@@ -23909,7 +23909,7 @@
             <a:fld id="{6700A58B-DD98-43D0-B791-721480A02982}" type="datetime1">
               <a:rPr lang="en-US" smtClean="0"/>
               <a:pPr/>
-              <a:t>6/24/25</a:t>
+              <a:t>6/10/26</a:t>
             </a:fld>
             <a:endParaRPr lang="en-US"/>
           </a:p>
@@ -24698,7 +24698,7 @@
             <a:fld id="{6700A58B-DD98-43D0-B791-721480A02982}" type="datetime1">
               <a:rPr lang="en-US" smtClean="0"/>
               <a:pPr/>
-              <a:t>6/24/25</a:t>
+              <a:t>6/10/26</a:t>
             </a:fld>
             <a:endParaRPr lang="en-US"/>
           </a:p>
@@ -25492,7 +25492,7 @@
           <a:p>
             <a:fld id="{6700A58B-DD98-43D0-B791-721480A02982}" type="datetime1">
               <a:rPr lang="en-US" smtClean="0"/>
-              <a:t>6/24/25</a:t>
+              <a:t>6/10/26</a:t>
             </a:fld>
             <a:endParaRPr lang="en-US"/>
           </a:p>
@@ -26244,7 +26244,7 @@
             <a:fld id="{6700A58B-DD98-43D0-B791-721480A02982}" type="datetime1">
               <a:rPr lang="en-US" smtClean="0"/>
               <a:pPr/>
-              <a:t>6/24/25</a:t>
+              <a:t>6/10/26</a:t>
             </a:fld>
             <a:endParaRPr lang="en-US"/>
           </a:p>
@@ -27222,7 +27222,7 @@
             <a:fld id="{6700A58B-DD98-43D0-B791-721480A02982}" type="datetime1">
               <a:rPr lang="en-US" smtClean="0"/>
               <a:pPr/>
-              <a:t>6/24/25</a:t>
+              <a:t>6/10/26</a:t>
             </a:fld>
             <a:endParaRPr lang="en-US"/>
           </a:p>
@@ -27888,7 +27888,7 @@
           <a:p>
             <a:fld id="{6700A58B-DD98-43D0-B791-721480A02982}" type="datetime1">
               <a:rPr lang="en-US" smtClean="0"/>
-              <a:t>6/24/25</a:t>
+              <a:t>6/10/26</a:t>
             </a:fld>
             <a:endParaRPr lang="en-US"/>
           </a:p>
@@ -28508,7 +28508,7 @@
           <a:p>
             <a:fld id="{6700A58B-DD98-43D0-B791-721480A02982}" type="datetime1">
               <a:rPr lang="en-US" smtClean="0"/>
-              <a:t>6/24/25</a:t>
+              <a:t>6/10/26</a:t>
             </a:fld>
             <a:endParaRPr lang="en-US"/>
           </a:p>
@@ -31140,7 +31140,7 @@
           <a:p>
             <a:fld id="{6700A58B-DD98-43D0-B791-721480A02982}" type="datetime1">
               <a:rPr lang="en-US" smtClean="0"/>
-              <a:t>6/24/25</a:t>
+              <a:t>6/10/26</a:t>
             </a:fld>
             <a:endParaRPr lang="en-US"/>
           </a:p>
@@ -31776,7 +31776,7 @@
           <a:p>
             <a:fld id="{6700A58B-DD98-43D0-B791-721480A02982}" type="datetime1">
               <a:rPr lang="en-US" smtClean="0"/>
-              <a:t>6/24/25</a:t>
+              <a:t>6/10/26</a:t>
             </a:fld>
             <a:endParaRPr lang="en-US"/>
           </a:p>
@@ -32135,7 +32135,7 @@
           <a:p>
             <a:fld id="{6700A58B-DD98-43D0-B791-721480A02982}" type="datetime1">
               <a:rPr lang="en-US" smtClean="0"/>
-              <a:t>6/24/25</a:t>
+              <a:t>6/10/26</a:t>
             </a:fld>
             <a:endParaRPr lang="en-US"/>
           </a:p>
@@ -32607,7 +32607,7 @@
           <a:p>
             <a:fld id="{6700A58B-DD98-43D0-B791-721480A02982}" type="datetime1">
               <a:rPr lang="en-US" smtClean="0"/>
-              <a:t>6/24/25</a:t>
+              <a:t>6/10/26</a:t>
             </a:fld>
             <a:endParaRPr lang="en-US"/>
           </a:p>
@@ -32950,7 +32950,7 @@
           <a:p>
             <a:fld id="{6700A58B-DD98-43D0-B791-721480A02982}" type="datetime1">
               <a:rPr lang="en-US" smtClean="0"/>
-              <a:t>6/24/25</a:t>
+              <a:t>6/10/26</a:t>
             </a:fld>
             <a:endParaRPr lang="en-US"/>
           </a:p>
@@ -33315,7 +33315,7 @@
           <a:p>
             <a:fld id="{6700A58B-DD98-43D0-B791-721480A02982}" type="datetime1">
               <a:rPr lang="en-US" smtClean="0"/>
-              <a:t>6/24/25</a:t>
+              <a:t>6/10/26</a:t>
             </a:fld>
             <a:endParaRPr lang="en-US"/>
           </a:p>
@@ -33763,7 +33763,7 @@
           <a:p>
             <a:fld id="{6700A58B-DD98-43D0-B791-721480A02982}" type="datetime1">
               <a:rPr lang="en-US" smtClean="0"/>
-              <a:t>6/24/25</a:t>
+              <a:t>6/10/26</a:t>
             </a:fld>
             <a:endParaRPr lang="en-US"/>
           </a:p>
@@ -34621,7 +34621,7 @@
           <a:p>
             <a:fld id="{6700A58B-DD98-43D0-B791-721480A02982}" type="datetime1">
               <a:rPr lang="en-US" smtClean="0"/>
-              <a:t>6/24/25</a:t>
+              <a:t>6/10/26</a:t>
             </a:fld>
             <a:endParaRPr lang="en-US"/>
           </a:p>
@@ -35563,7 +35563,7 @@
           <a:p>
             <a:fld id="{6700A58B-DD98-43D0-B791-721480A02982}" type="datetime1">
               <a:rPr lang="en-US" smtClean="0"/>
-              <a:t>6/24/25</a:t>
+              <a:t>6/10/26</a:t>
             </a:fld>
             <a:endParaRPr lang="en-US"/>
           </a:p>
@@ -36407,7 +36407,7 @@
           <a:p>
             <a:fld id="{6700A58B-DD98-43D0-B791-721480A02982}" type="datetime1">
               <a:rPr lang="en-US" smtClean="0"/>
-              <a:t>6/24/25</a:t>
+              <a:t>6/10/26</a:t>
             </a:fld>
             <a:endParaRPr lang="en-US"/>
           </a:p>
@@ -37130,7 +37130,7 @@
           <a:p>
             <a:fld id="{6700A58B-DD98-43D0-B791-721480A02982}" type="datetime1">
               <a:rPr lang="en-US" smtClean="0"/>
-              <a:t>6/24/25</a:t>
+              <a:t>6/10/26</a:t>
             </a:fld>
             <a:endParaRPr lang="en-US"/>
           </a:p>
@@ -38008,7 +38008,7 @@
           <a:p>
             <a:fld id="{6700A58B-DD98-43D0-B791-721480A02982}" type="datetime1">
               <a:rPr lang="en-US" smtClean="0"/>
-              <a:t>6/24/25</a:t>
+              <a:t>6/10/26</a:t>
             </a:fld>
             <a:endParaRPr lang="en-US"/>
           </a:p>
@@ -38554,7 +38554,7 @@
           <a:p>
             <a:fld id="{6700A58B-DD98-43D0-B791-721480A02982}" type="datetime1">
               <a:rPr lang="en-US" smtClean="0"/>
-              <a:t>6/24/25</a:t>
+              <a:t>6/10/26</a:t>
             </a:fld>
             <a:endParaRPr lang="en-US"/>
           </a:p>
@@ -38655,8 +38655,8 @@
         </p:nvSpPr>
         <p:spPr>
           <a:xfrm>
-            <a:off x="204952" y="1608081"/>
-            <a:ext cx="8135007" cy="923330"/>
+            <a:off x="254599" y="1723836"/>
+            <a:ext cx="8135007" cy="646331"/>
           </a:xfrm>
           <a:prstGeom prst="rect">
             <a:avLst/>
@@ -38685,23 +38685,7 @@
             </a:pPr>
             <a:r>
               <a:rPr lang="en-US" dirty="0"/>
-              <a:t>Values are normalized to 0,1</a:t>
-            </a:r>
-          </a:p>
-          <a:p>
-            <a:pPr marL="285750" indent="-285750">
-              <a:buFont typeface="Arial" panose="020B0604020202020204" pitchFamily="34" charset="0"/>
-              <a:buChar char="•"/>
-            </a:pPr>
-            <a:r>
-              <a:rPr lang="en-US" b="1" u="sng" dirty="0">
-                <a:solidFill>
-                  <a:schemeClr val="accent1">
-                    <a:lumMod val="75000"/>
-                  </a:schemeClr>
-                </a:solidFill>
-              </a:rPr>
-              <a:t>Cosine is measuring similarity…so a value of 0 means orthogonal (independent)</a:t>
+              <a:t>Values are normalized to 0,1 for text (but elsewhere can be -1 to 1</a:t>
             </a:r>
           </a:p>
         </p:txBody>
@@ -38765,7 +38749,7 @@
         </p:nvGrpSpPr>
         <p:grpSpPr>
           <a:xfrm>
-            <a:off x="2751083" y="2465921"/>
+            <a:off x="3028950" y="2633554"/>
             <a:ext cx="3111835" cy="3356655"/>
             <a:chOff x="2506719" y="2465921"/>
             <a:chExt cx="3641835" cy="3668843"/>
@@ -38849,7 +38833,7 @@
         </p:nvSpPr>
         <p:spPr>
           <a:xfrm>
-            <a:off x="252249" y="1056289"/>
+            <a:off x="4068551" y="251019"/>
             <a:ext cx="4144468" cy="646331"/>
           </a:xfrm>
           <a:prstGeom prst="rect">
@@ -38955,8 +38939,8 @@
         </p:nvCxnSpPr>
         <p:spPr>
           <a:xfrm flipH="1">
-            <a:off x="4924279" y="3050627"/>
-            <a:ext cx="901080" cy="577072"/>
+            <a:off x="5202146" y="3050627"/>
+            <a:ext cx="623213" cy="744705"/>
           </a:xfrm>
           <a:prstGeom prst="straightConnector1">
             <a:avLst/>
@@ -39069,6 +39053,50 @@
           </a:fontRef>
         </p:style>
       </p:cxnSp>
+      <p:sp>
+        <p:nvSpPr>
+          <p:cNvPr id="19" name="TextBox 18">
+            <a:extLst>
+              <a:ext uri="{FF2B5EF4-FFF2-40B4-BE49-F238E27FC236}">
+                <a16:creationId xmlns:a16="http://schemas.microsoft.com/office/drawing/2014/main" id="{DBA5FB8C-F419-4BE9-03D9-721E78650FB7}"/>
+              </a:ext>
+            </a:extLst>
+          </p:cNvPr>
+          <p:cNvSpPr txBox="1"/>
+          <p:nvPr/>
+        </p:nvSpPr>
+        <p:spPr>
+          <a:xfrm>
+            <a:off x="160019" y="3554874"/>
+            <a:ext cx="2868931" cy="1477328"/>
+          </a:xfrm>
+          <a:prstGeom prst="rect">
+            <a:avLst/>
+          </a:prstGeom>
+          <a:noFill/>
+        </p:spPr>
+        <p:txBody>
+          <a:bodyPr wrap="square">
+            <a:spAutoFit/>
+          </a:bodyPr>
+          <a:lstStyle/>
+          <a:p>
+            <a:r>
+              <a:rPr lang="en-US" dirty="0"/>
+              <a:t>1 = perfect similarity (same direction) </a:t>
+            </a:r>
+          </a:p>
+          <a:p>
+            <a:endParaRPr lang="en-US" dirty="0"/>
+          </a:p>
+          <a:p>
+            <a:r>
+              <a:rPr lang="en-US" dirty="0"/>
+              <a:t>0 = no similarity (orthogonal/perpendicular)</a:t>
+            </a:r>
+          </a:p>
+        </p:txBody>
+      </p:sp>
     </p:spTree>
     <p:extLst>
       <p:ext uri="{BB962C8B-B14F-4D97-AF65-F5344CB8AC3E}">
@@ -39122,7 +39150,7 @@
           <a:p>
             <a:fld id="{6700A58B-DD98-43D0-B791-721480A02982}" type="datetime1">
               <a:rPr lang="en-US" smtClean="0"/>
-              <a:t>6/24/25</a:t>
+              <a:t>6/10/26</a:t>
             </a:fld>
             <a:endParaRPr lang="en-US"/>
           </a:p>
@@ -39594,7 +39622,7 @@
           <a:p>
             <a:fld id="{6700A58B-DD98-43D0-B791-721480A02982}" type="datetime1">
               <a:rPr lang="en-US" smtClean="0"/>
-              <a:t>6/24/25</a:t>
+              <a:t>6/10/26</a:t>
             </a:fld>
             <a:endParaRPr lang="en-US"/>
           </a:p>
@@ -39970,7 +39998,7 @@
           <a:p>
             <a:fld id="{6700A58B-DD98-43D0-B791-721480A02982}" type="datetime1">
               <a:rPr lang="en-US" smtClean="0"/>
-              <a:t>6/24/25</a:t>
+              <a:t>6/10/26</a:t>
             </a:fld>
             <a:endParaRPr lang="en-US"/>
           </a:p>
@@ -40218,7 +40246,7 @@
           <a:p>
             <a:fld id="{6700A58B-DD98-43D0-B791-721480A02982}" type="datetime1">
               <a:rPr lang="en-US" smtClean="0"/>
-              <a:t>6/24/25</a:t>
+              <a:t>6/10/26</a:t>
             </a:fld>
             <a:endParaRPr lang="en-US"/>
           </a:p>
@@ -40511,7 +40539,7 @@
           <a:p>
             <a:fld id="{6700A58B-DD98-43D0-B791-721480A02982}" type="datetime1">
               <a:rPr lang="en-US" smtClean="0"/>
-              <a:t>6/24/25</a:t>
+              <a:t>6/10/26</a:t>
             </a:fld>
             <a:endParaRPr lang="en-US"/>
           </a:p>
@@ -40813,7 +40841,7 @@
           <a:p>
             <a:fld id="{6700A58B-DD98-43D0-B791-721480A02982}" type="datetime1">
               <a:rPr lang="en-US" smtClean="0"/>
-              <a:t>6/24/25</a:t>
+              <a:t>6/10/26</a:t>
             </a:fld>
             <a:endParaRPr lang="en-US"/>
           </a:p>
@@ -41448,7 +41476,7 @@
           <a:p>
             <a:fld id="{6700A58B-DD98-43D0-B791-721480A02982}" type="datetime1">
               <a:rPr lang="en-US" smtClean="0"/>
-              <a:t>6/24/25</a:t>
+              <a:t>6/10/26</a:t>
             </a:fld>
             <a:endParaRPr lang="en-US"/>
           </a:p>
@@ -42075,7 +42103,7 @@
           <a:p>
             <a:fld id="{6700A58B-DD98-43D0-B791-721480A02982}" type="datetime1">
               <a:rPr lang="en-US" smtClean="0"/>
-              <a:t>6/24/25</a:t>
+              <a:t>6/10/26</a:t>
             </a:fld>
             <a:endParaRPr lang="en-US"/>
           </a:p>
@@ -43088,7 +43116,7 @@
           <a:p>
             <a:fld id="{6700A58B-DD98-43D0-B791-721480A02982}" type="datetime1">
               <a:rPr lang="en-US" smtClean="0"/>
-              <a:t>6/24/25</a:t>
+              <a:t>6/10/26</a:t>
             </a:fld>
             <a:endParaRPr lang="en-US"/>
           </a:p>
@@ -43590,7 +43618,7 @@
             <a:fld id="{6700A58B-DD98-43D0-B791-721480A02982}" type="datetime1">
               <a:rPr lang="en-US" smtClean="0"/>
               <a:pPr/>
-              <a:t>6/24/25</a:t>
+              <a:t>6/10/26</a:t>
             </a:fld>
             <a:endParaRPr lang="en-US"/>
           </a:p>
